--- a/Mid Project Presentation.pptx
+++ b/Mid Project Presentation.pptx
@@ -623,7 +623,7 @@
           <a:p>
             <a:fld id="{A23C7EEE-1AD9-4CFE-8AFB-1041F302144F}" type="datetimeFigureOut">
               <a:rPr lang="en-NZ" smtClean="0"/>
-              <a:t>10/09/2026</a:t>
+              <a:t>22/10/2026</a:t>
             </a:fld>
             <a:endParaRPr lang="en-NZ"/>
           </a:p>
@@ -898,7 +898,7 @@
           <a:p>
             <a:fld id="{A23C7EEE-1AD9-4CFE-8AFB-1041F302144F}" type="datetimeFigureOut">
               <a:rPr lang="en-NZ" smtClean="0"/>
-              <a:t>10/09/2026</a:t>
+              <a:t>22/10/2026</a:t>
             </a:fld>
             <a:endParaRPr lang="en-NZ"/>
           </a:p>
@@ -1092,7 +1092,7 @@
           <a:p>
             <a:fld id="{A23C7EEE-1AD9-4CFE-8AFB-1041F302144F}" type="datetimeFigureOut">
               <a:rPr lang="en-NZ" smtClean="0"/>
-              <a:t>10/09/2026</a:t>
+              <a:t>22/10/2026</a:t>
             </a:fld>
             <a:endParaRPr lang="en-NZ"/>
           </a:p>
@@ -1365,7 +1365,7 @@
           <a:p>
             <a:fld id="{A23C7EEE-1AD9-4CFE-8AFB-1041F302144F}" type="datetimeFigureOut">
               <a:rPr lang="en-NZ" smtClean="0"/>
-              <a:t>10/09/2026</a:t>
+              <a:t>22/10/2026</a:t>
             </a:fld>
             <a:endParaRPr lang="en-NZ"/>
           </a:p>
@@ -1706,7 +1706,7 @@
           <a:p>
             <a:fld id="{A23C7EEE-1AD9-4CFE-8AFB-1041F302144F}" type="datetimeFigureOut">
               <a:rPr lang="en-NZ" smtClean="0"/>
-              <a:t>10/09/2026</a:t>
+              <a:t>22/10/2026</a:t>
             </a:fld>
             <a:endParaRPr lang="en-NZ"/>
           </a:p>
@@ -2329,7 +2329,7 @@
           <a:p>
             <a:fld id="{A23C7EEE-1AD9-4CFE-8AFB-1041F302144F}" type="datetimeFigureOut">
               <a:rPr lang="en-NZ" smtClean="0"/>
-              <a:t>10/09/2026</a:t>
+              <a:t>22/10/2026</a:t>
             </a:fld>
             <a:endParaRPr lang="en-NZ"/>
           </a:p>
@@ -3189,7 +3189,7 @@
           <a:p>
             <a:fld id="{A23C7EEE-1AD9-4CFE-8AFB-1041F302144F}" type="datetimeFigureOut">
               <a:rPr lang="en-NZ" smtClean="0"/>
-              <a:t>10/09/2026</a:t>
+              <a:t>22/10/2026</a:t>
             </a:fld>
             <a:endParaRPr lang="en-NZ"/>
           </a:p>
@@ -3359,7 +3359,7 @@
           <a:p>
             <a:fld id="{A23C7EEE-1AD9-4CFE-8AFB-1041F302144F}" type="datetimeFigureOut">
               <a:rPr lang="en-NZ" smtClean="0"/>
-              <a:t>10/09/2026</a:t>
+              <a:t>22/10/2026</a:t>
             </a:fld>
             <a:endParaRPr lang="en-NZ"/>
           </a:p>
@@ -3539,7 +3539,7 @@
           <a:p>
             <a:fld id="{A23C7EEE-1AD9-4CFE-8AFB-1041F302144F}" type="datetimeFigureOut">
               <a:rPr lang="en-NZ" smtClean="0"/>
-              <a:t>10/09/2026</a:t>
+              <a:t>22/10/2026</a:t>
             </a:fld>
             <a:endParaRPr lang="en-NZ"/>
           </a:p>
@@ -3709,7 +3709,7 @@
           <a:p>
             <a:fld id="{A23C7EEE-1AD9-4CFE-8AFB-1041F302144F}" type="datetimeFigureOut">
               <a:rPr lang="en-NZ" smtClean="0"/>
-              <a:t>10/09/2026</a:t>
+              <a:t>22/10/2026</a:t>
             </a:fld>
             <a:endParaRPr lang="en-NZ"/>
           </a:p>
@@ -3956,7 +3956,7 @@
           <a:p>
             <a:fld id="{A23C7EEE-1AD9-4CFE-8AFB-1041F302144F}" type="datetimeFigureOut">
               <a:rPr lang="en-NZ" smtClean="0"/>
-              <a:t>10/09/2026</a:t>
+              <a:t>22/10/2026</a:t>
             </a:fld>
             <a:endParaRPr lang="en-NZ"/>
           </a:p>
@@ -4248,7 +4248,7 @@
           <a:p>
             <a:fld id="{A23C7EEE-1AD9-4CFE-8AFB-1041F302144F}" type="datetimeFigureOut">
               <a:rPr lang="en-NZ" smtClean="0"/>
-              <a:t>10/09/2026</a:t>
+              <a:t>22/10/2026</a:t>
             </a:fld>
             <a:endParaRPr lang="en-NZ"/>
           </a:p>
@@ -4692,7 +4692,7 @@
           <a:p>
             <a:fld id="{A23C7EEE-1AD9-4CFE-8AFB-1041F302144F}" type="datetimeFigureOut">
               <a:rPr lang="en-NZ" smtClean="0"/>
-              <a:t>10/09/2026</a:t>
+              <a:t>22/10/2026</a:t>
             </a:fld>
             <a:endParaRPr lang="en-NZ"/>
           </a:p>
@@ -4810,7 +4810,7 @@
           <a:p>
             <a:fld id="{A23C7EEE-1AD9-4CFE-8AFB-1041F302144F}" type="datetimeFigureOut">
               <a:rPr lang="en-NZ" smtClean="0"/>
-              <a:t>10/09/2026</a:t>
+              <a:t>22/10/2026</a:t>
             </a:fld>
             <a:endParaRPr lang="en-NZ"/>
           </a:p>
@@ -4905,7 +4905,7 @@
           <a:p>
             <a:fld id="{A23C7EEE-1AD9-4CFE-8AFB-1041F302144F}" type="datetimeFigureOut">
               <a:rPr lang="en-NZ" smtClean="0"/>
-              <a:t>10/09/2026</a:t>
+              <a:t>22/10/2026</a:t>
             </a:fld>
             <a:endParaRPr lang="en-NZ"/>
           </a:p>
@@ -5184,7 +5184,7 @@
           <a:p>
             <a:fld id="{A23C7EEE-1AD9-4CFE-8AFB-1041F302144F}" type="datetimeFigureOut">
               <a:rPr lang="en-NZ" smtClean="0"/>
-              <a:t>10/09/2026</a:t>
+              <a:t>22/10/2026</a:t>
             </a:fld>
             <a:endParaRPr lang="en-NZ"/>
           </a:p>
@@ -5459,7 +5459,7 @@
           <a:p>
             <a:fld id="{A23C7EEE-1AD9-4CFE-8AFB-1041F302144F}" type="datetimeFigureOut">
               <a:rPr lang="en-NZ" smtClean="0"/>
-              <a:t>10/09/2026</a:t>
+              <a:t>22/10/2026</a:t>
             </a:fld>
             <a:endParaRPr lang="en-NZ"/>
           </a:p>
@@ -5662,6 +5662,13 @@
             <a:schemeClr val="lt1"/>
           </a:fontRef>
         </p:style>
+        <p:txBody>
+          <a:bodyPr/>
+          <a:lstStyle/>
+          <a:p>
+            <a:endParaRPr lang="en-NZ"/>
+          </a:p>
+        </p:txBody>
       </p:sp>
       <p:pic>
         <p:nvPicPr>
@@ -5756,6 +5763,13 @@
             <a:schemeClr val="lt1"/>
           </a:fontRef>
         </p:style>
+        <p:txBody>
+          <a:bodyPr/>
+          <a:lstStyle/>
+          <a:p>
+            <a:endParaRPr lang="en-NZ"/>
+          </a:p>
+        </p:txBody>
       </p:sp>
       <p:sp>
         <p:nvSpPr>
@@ -5888,7 +5902,7 @@
           <a:p>
             <a:fld id="{A23C7EEE-1AD9-4CFE-8AFB-1041F302144F}" type="datetimeFigureOut">
               <a:rPr lang="en-NZ" smtClean="0"/>
-              <a:t>10/09/2026</a:t>
+              <a:t>22/10/2026</a:t>
             </a:fld>
             <a:endParaRPr lang="en-NZ"/>
           </a:p>
